--- a/docs/NEXUS_Round2.pptx
+++ b/docs/NEXUS_Round2.pptx
@@ -22,6 +22,7 @@
     <p:sldId id="270" r:id="rId21"/>
     <p:sldId id="271" r:id="rId22"/>
     <p:sldId id="272" r:id="rId23"/>
+    <p:sldId id="273" r:id="rId24"/>
   </p:sldIdLst>
   <p:sldSz cx="12191695" cy="6858000" type="screen4x3"/>
   <p:notesSz cx="6858000" cy="9144000"/>
@@ -3749,7 +3750,7 @@
                 </a:solidFill>
                 <a:latin typeface="Segoe UI"/>
               </a:rPr>
-              <a:t>Axis starts at 29s so the gap is visible. Max-Pressure is a genuinely good published controller - beating it by 1.6% is the honest claim, not 10x.</a:t>
+              <a:t>Axis starts at 28s so the gap is visible. Max-Pressure is a genuinely good published controller - beating it by 6.8% is the honest claim, not 10x.</a:t>
             </a:r>
           </a:p>
         </p:txBody>
@@ -3850,7 +3851,7 @@
                 </a:solidFill>
                 <a:latin typeface="Consolas"/>
               </a:rPr>
-              <a:t>AND ON A REAL ROAD</a:t>
+              <a:t>PROOF IT WAS TRAINED, NOT TUNED</a:t>
             </a:r>
           </a:p>
         </p:txBody>
@@ -3883,20 +3884,20 @@
               </a:lnSpc>
             </a:pPr>
             <a:r>
-              <a:rPr sz="3000" b="1" i="0">
+              <a:rPr sz="3400" b="1" i="0">
                 <a:solidFill>
                   <a:srgbClr val="E8ECF2"/>
                 </a:solidFill>
                 <a:latin typeface="Segoe UI"/>
               </a:rPr>
-              <a:t>Vijayawada corridor · 1.71 km · 19 signalised junctions</a:t>
+              <a:t>The loss falls. So does the held-out score.</a:t>
             </a:r>
           </a:p>
         </p:txBody>
       </p:sp>
       <p:pic>
         <p:nvPicPr>
-          <p:cNvPr id="5" name="Picture 4" descr="corridor.png"/>
+          <p:cNvPr id="5" name="Picture 4" descr="training.png"/>
           <p:cNvPicPr>
             <a:picLocks noChangeAspect="1"/>
           </p:cNvPicPr>
@@ -3910,8 +3911,8 @@
         </p:blipFill>
         <p:spPr>
           <a:xfrm>
-            <a:off x="975207" y="1965960"/>
-            <a:ext cx="10241280" cy="3584448"/>
+            <a:off x="792327" y="1828800"/>
+            <a:ext cx="10607040" cy="3733678"/>
           </a:xfrm>
           <a:prstGeom prst="rect">
             <a:avLst/>
@@ -3926,7 +3927,7 @@
         </p:nvSpPr>
         <p:spPr>
           <a:xfrm>
-            <a:off x="777240" y="5806440"/>
+            <a:off x="777240" y="5943600"/>
             <a:ext cx="10607040" cy="731520"/>
           </a:xfrm>
           <a:prstGeom prst="rect">
@@ -3946,13 +3947,13 @@
               </a:lnSpc>
             </a:pPr>
             <a:r>
-              <a:rPr sz="1400" b="0" i="1">
+              <a:rPr sz="1300" b="0" i="1">
                 <a:solidFill>
                   <a:srgbClr val="8A94A6"/>
                 </a:solidFill>
                 <a:latin typeface="Segoe UI"/>
               </a:rPr>
-              <a:t>Imported from OpenStreetMap, simulated in SUMO. The ambulance gains and everyone else does not lose - which is the only version of this that a city would accept.</a:t>
+              <a:t>Left proves only that the network fits its own labels. Right is the same network scored every five epochs on seeds it was never trained on. It stays under both baselines at every single probe, and it wanders - which is what a real measurement looks like.</a:t>
             </a:r>
           </a:p>
         </p:txBody>
@@ -4053,7 +4054,7 @@
                 </a:solidFill>
                 <a:latin typeface="Consolas"/>
               </a:rPr>
-              <a:t>WHAT IS ALREADY OUT THERE</a:t>
+              <a:t>AND ON A REAL ROAD</a:t>
             </a:r>
           </a:p>
         </p:txBody>
@@ -4086,61 +4087,41 @@
               </a:lnSpc>
             </a:pPr>
             <a:r>
-              <a:rPr sz="3200" b="1" i="0">
+              <a:rPr sz="3000" b="1" i="0">
                 <a:solidFill>
                   <a:srgbClr val="E8ECF2"/>
                 </a:solidFill>
                 <a:latin typeface="Segoe UI"/>
               </a:rPr>
-              <a:t>Adaptive control is not new. I am not pretending it is.</a:t>
-            </a:r>
-          </a:p>
-        </p:txBody>
-      </p:sp>
-      <p:sp>
-        <p:nvSpPr>
-          <p:cNvPr id="5" name="Rectangle 4"/>
-          <p:cNvSpPr/>
-          <p:nvPr/>
-        </p:nvSpPr>
-        <p:spPr>
-          <a:xfrm>
-            <a:off x="777240" y="1965960"/>
-            <a:ext cx="822960" cy="32004"/>
-          </a:xfrm>
-          <a:prstGeom prst="rect">
-            <a:avLst/>
-          </a:prstGeom>
-          <a:solidFill>
-            <a:srgbClr val="8A94A6"/>
-          </a:solidFill>
-          <a:ln>
-            <a:noFill/>
-          </a:ln>
-          <a:effectLst/>
-        </p:spPr>
-        <p:style>
-          <a:lnRef idx="1">
-            <a:schemeClr val="accent1"/>
-          </a:lnRef>
-          <a:fillRef idx="3">
-            <a:schemeClr val="accent1"/>
-          </a:fillRef>
-          <a:effectRef idx="2">
-            <a:schemeClr val="accent1"/>
-          </a:effectRef>
-          <a:fontRef idx="minor">
-            <a:schemeClr val="lt1"/>
-          </a:fontRef>
-        </p:style>
-        <p:txBody>
-          <a:bodyPr rtlCol="0" anchor="ctr"/>
-          <a:lstStyle/>
-          <a:p>
-            <a:pPr algn="ctr"/>
-          </a:p>
-        </p:txBody>
-      </p:sp>
+              <a:t>Vijayawada corridor · 1.71 km · 19 signalised junctions</a:t>
+            </a:r>
+          </a:p>
+        </p:txBody>
+      </p:sp>
+      <p:pic>
+        <p:nvPicPr>
+          <p:cNvPr id="5" name="Picture 4" descr="corridor.png"/>
+          <p:cNvPicPr>
+            <a:picLocks noChangeAspect="1"/>
+          </p:cNvPicPr>
+          <p:nvPr/>
+        </p:nvPicPr>
+        <p:blipFill>
+          <a:blip r:embed="rId2"/>
+          <a:stretch>
+            <a:fillRect/>
+          </a:stretch>
+        </p:blipFill>
+        <p:spPr>
+          <a:xfrm>
+            <a:off x="975207" y="1965960"/>
+            <a:ext cx="10241280" cy="3584448"/>
+          </a:xfrm>
+          <a:prstGeom prst="rect">
+            <a:avLst/>
+          </a:prstGeom>
+        </p:spPr>
+      </p:pic>
       <p:sp>
         <p:nvSpPr>
           <p:cNvPr id="6" name="TextBox 5"/>
@@ -4149,8 +4130,8 @@
         </p:nvSpPr>
         <p:spPr>
           <a:xfrm>
-            <a:off x="777240" y="2240280"/>
-            <a:ext cx="4937760" cy="2194560"/>
+            <a:off x="777240" y="5806440"/>
+            <a:ext cx="10607040" cy="731520"/>
           </a:xfrm>
           <a:prstGeom prst="rect">
             <a:avLst/>
@@ -4165,363 +4146,17 @@
           <a:p>
             <a:pPr algn="l">
               <a:lnSpc>
-                <a:spcPct val="140000"/>
-              </a:lnSpc>
-            </a:pPr>
-            <a:r>
-              <a:rPr sz="1500" b="0" i="0">
+                <a:spcPct val="115000"/>
+              </a:lnSpc>
+            </a:pPr>
+            <a:r>
+              <a:rPr sz="1400" b="0" i="1">
                 <a:solidFill>
                   <a:srgbClr val="8A94A6"/>
                 </a:solidFill>
                 <a:latin typeface="Segoe UI"/>
               </a:rPr>
-              <a:t>ALREADY DEPLOYED</a:t>
-            </a:r>
-          </a:p>
-          <a:p>
-            <a:pPr algn="l">
-              <a:lnSpc>
-                <a:spcPct val="140000"/>
-              </a:lnSpc>
-            </a:pPr>
-            <a:r>
-              <a:rPr sz="1500" b="0" i="0">
-                <a:solidFill>
-                  <a:srgbClr val="8A94A6"/>
-                </a:solidFill>
-                <a:latin typeface="Segoe UI"/>
-              </a:rPr>
-              <a:t/>
-            </a:r>
-          </a:p>
-          <a:p>
-            <a:pPr algn="l">
-              <a:lnSpc>
-                <a:spcPct val="140000"/>
-              </a:lnSpc>
-            </a:pPr>
-            <a:r>
-              <a:rPr sz="1500" b="0" i="0">
-                <a:solidFill>
-                  <a:srgbClr val="8A94A6"/>
-                </a:solidFill>
-                <a:latin typeface="Segoe UI"/>
-              </a:rPr>
-              <a:t>Bengaluru B-ATCS</a:t>
-            </a:r>
-          </a:p>
-          <a:p>
-            <a:pPr algn="l">
-              <a:lnSpc>
-                <a:spcPct val="140000"/>
-              </a:lnSpc>
-            </a:pPr>
-            <a:r>
-              <a:rPr sz="1500" b="0" i="0">
-                <a:solidFill>
-                  <a:srgbClr val="8A94A6"/>
-                </a:solidFill>
-                <a:latin typeface="Segoe UI"/>
-              </a:rPr>
-              <a:t>~165 junctions, ~33% at Hudson Circle</a:t>
-            </a:r>
-          </a:p>
-          <a:p>
-            <a:pPr algn="l">
-              <a:lnSpc>
-                <a:spcPct val="140000"/>
-              </a:lnSpc>
-            </a:pPr>
-            <a:r>
-              <a:rPr sz="1500" b="0" i="0">
-                <a:solidFill>
-                  <a:srgbClr val="8A94A6"/>
-                </a:solidFill>
-                <a:latin typeface="Segoe UI"/>
-              </a:rPr>
-              <a:t/>
-            </a:r>
-          </a:p>
-          <a:p>
-            <a:pPr algn="l">
-              <a:lnSpc>
-                <a:spcPct val="140000"/>
-              </a:lnSpc>
-            </a:pPr>
-            <a:r>
-              <a:rPr sz="1500" b="0" i="0">
-                <a:solidFill>
-                  <a:srgbClr val="8A94A6"/>
-                </a:solidFill>
-                <a:latin typeface="Segoe UI"/>
-              </a:rPr>
-              <a:t>Pittsburgh Surtrac</a:t>
-            </a:r>
-          </a:p>
-          <a:p>
-            <a:pPr algn="l">
-              <a:lnSpc>
-                <a:spcPct val="140000"/>
-              </a:lnSpc>
-            </a:pPr>
-            <a:r>
-              <a:rPr sz="1500" b="0" i="0">
-                <a:solidFill>
-                  <a:srgbClr val="8A94A6"/>
-                </a:solidFill>
-                <a:latin typeface="Segoe UI"/>
-              </a:rPr>
-              <a:t>~25% travel time reduction</a:t>
-            </a:r>
-          </a:p>
-        </p:txBody>
-      </p:sp>
-      <p:sp>
-        <p:nvSpPr>
-          <p:cNvPr id="7" name="Rectangle 6"/>
-          <p:cNvSpPr/>
-          <p:nvPr/>
-        </p:nvSpPr>
-        <p:spPr>
-          <a:xfrm>
-            <a:off x="6126480" y="1965960"/>
-            <a:ext cx="822960" cy="32004"/>
-          </a:xfrm>
-          <a:prstGeom prst="rect">
-            <a:avLst/>
-          </a:prstGeom>
-          <a:solidFill>
-            <a:srgbClr val="F5A524"/>
-          </a:solidFill>
-          <a:ln>
-            <a:noFill/>
-          </a:ln>
-          <a:effectLst/>
-        </p:spPr>
-        <p:style>
-          <a:lnRef idx="1">
-            <a:schemeClr val="accent1"/>
-          </a:lnRef>
-          <a:fillRef idx="3">
-            <a:schemeClr val="accent1"/>
-          </a:fillRef>
-          <a:effectRef idx="2">
-            <a:schemeClr val="accent1"/>
-          </a:effectRef>
-          <a:fontRef idx="minor">
-            <a:schemeClr val="lt1"/>
-          </a:fontRef>
-        </p:style>
-        <p:txBody>
-          <a:bodyPr rtlCol="0" anchor="ctr"/>
-          <a:lstStyle/>
-          <a:p>
-            <a:pPr algn="ctr"/>
-          </a:p>
-        </p:txBody>
-      </p:sp>
-      <p:sp>
-        <p:nvSpPr>
-          <p:cNvPr id="8" name="TextBox 7"/>
-          <p:cNvSpPr txBox="1"/>
-          <p:nvPr/>
-        </p:nvSpPr>
-        <p:spPr>
-          <a:xfrm>
-            <a:off x="6126480" y="2240280"/>
-            <a:ext cx="5212080" cy="2926080"/>
-          </a:xfrm>
-          <a:prstGeom prst="rect">
-            <a:avLst/>
-          </a:prstGeom>
-          <a:noFill/>
-        </p:spPr>
-        <p:txBody>
-          <a:bodyPr wrap="square" anchor="t">
-            <a:spAutoFit/>
-          </a:bodyPr>
-          <a:lstStyle/>
-          <a:p>
-            <a:pPr algn="l">
-              <a:lnSpc>
-                <a:spcPct val="140000"/>
-              </a:lnSpc>
-            </a:pPr>
-            <a:r>
-              <a:rPr sz="1500" b="0" i="0">
-                <a:solidFill>
-                  <a:srgbClr val="E8ECF2"/>
-                </a:solidFill>
-                <a:latin typeface="Segoe UI"/>
-              </a:rPr>
-              <a:t>WHAT THEY DO NOT GIVE YOU</a:t>
-            </a:r>
-          </a:p>
-          <a:p>
-            <a:pPr algn="l">
-              <a:lnSpc>
-                <a:spcPct val="140000"/>
-              </a:lnSpc>
-            </a:pPr>
-            <a:r>
-              <a:rPr sz="1500" b="0" i="0">
-                <a:solidFill>
-                  <a:srgbClr val="E8ECF2"/>
-                </a:solidFill>
-                <a:latin typeface="Segoe UI"/>
-              </a:rPr>
-              <a:t/>
-            </a:r>
-          </a:p>
-          <a:p>
-            <a:pPr algn="l">
-              <a:lnSpc>
-                <a:spcPct val="140000"/>
-              </a:lnSpc>
-            </a:pPr>
-            <a:r>
-              <a:rPr sz="1500" b="0" i="0">
-                <a:solidFill>
-                  <a:srgbClr val="E8ECF2"/>
-                </a:solidFill>
-                <a:latin typeface="Segoe UI"/>
-              </a:rPr>
-              <a:t>Preview a change before deploying it,</a:t>
-            </a:r>
-          </a:p>
-          <a:p>
-            <a:pPr algn="l">
-              <a:lnSpc>
-                <a:spcPct val="140000"/>
-              </a:lnSpc>
-            </a:pPr>
-            <a:r>
-              <a:rPr sz="1500" b="0" i="0">
-                <a:solidFill>
-                  <a:srgbClr val="E8ECF2"/>
-                </a:solidFill>
-                <a:latin typeface="Segoe UI"/>
-              </a:rPr>
-              <a:t>on the same traffic</a:t>
-            </a:r>
-          </a:p>
-          <a:p>
-            <a:pPr algn="l">
-              <a:lnSpc>
-                <a:spcPct val="140000"/>
-              </a:lnSpc>
-            </a:pPr>
-            <a:r>
-              <a:rPr sz="1500" b="0" i="0">
-                <a:solidFill>
-                  <a:srgbClr val="E8ECF2"/>
-                </a:solidFill>
-                <a:latin typeface="Segoe UI"/>
-              </a:rPr>
-              <a:t/>
-            </a:r>
-          </a:p>
-          <a:p>
-            <a:pPr algn="l">
-              <a:lnSpc>
-                <a:spcPct val="140000"/>
-              </a:lnSpc>
-            </a:pPr>
-            <a:r>
-              <a:rPr sz="1500" b="0" i="0">
-                <a:solidFill>
-                  <a:srgbClr val="E8ECF2"/>
-                </a:solidFill>
-                <a:latin typeface="Segoe UI"/>
-              </a:rPr>
-              <a:t>A stated reason for every decision,</a:t>
-            </a:r>
-          </a:p>
-          <a:p>
-            <a:pPr algn="l">
-              <a:lnSpc>
-                <a:spcPct val="140000"/>
-              </a:lnSpc>
-            </a:pPr>
-            <a:r>
-              <a:rPr sz="1500" b="0" i="0">
-                <a:solidFill>
-                  <a:srgbClr val="E8ECF2"/>
-                </a:solidFill>
-                <a:latin typeface="Segoe UI"/>
-              </a:rPr>
-              <a:t>in numbers you can check</a:t>
-            </a:r>
-          </a:p>
-          <a:p>
-            <a:pPr algn="l">
-              <a:lnSpc>
-                <a:spcPct val="140000"/>
-              </a:lnSpc>
-            </a:pPr>
-            <a:r>
-              <a:rPr sz="1500" b="0" i="0">
-                <a:solidFill>
-                  <a:srgbClr val="E8ECF2"/>
-                </a:solidFill>
-                <a:latin typeface="Segoe UI"/>
-              </a:rPr>
-              <a:t/>
-            </a:r>
-          </a:p>
-          <a:p>
-            <a:pPr algn="l">
-              <a:lnSpc>
-                <a:spcPct val="140000"/>
-              </a:lnSpc>
-            </a:pPr>
-            <a:r>
-              <a:rPr sz="1500" b="0" i="0">
-                <a:solidFill>
-                  <a:srgbClr val="E8ECF2"/>
-                </a:solidFill>
-                <a:latin typeface="Segoe UI"/>
-              </a:rPr>
-              <a:t>A published price for granting priority</a:t>
-            </a:r>
-          </a:p>
-        </p:txBody>
-      </p:sp>
-      <p:sp>
-        <p:nvSpPr>
-          <p:cNvPr id="9" name="TextBox 8"/>
-          <p:cNvSpPr txBox="1"/>
-          <p:nvPr/>
-        </p:nvSpPr>
-        <p:spPr>
-          <a:xfrm>
-            <a:off x="777240" y="5577840"/>
-            <a:ext cx="10607040" cy="731520"/>
-          </a:xfrm>
-          <a:prstGeom prst="rect">
-            <a:avLst/>
-          </a:prstGeom>
-          <a:noFill/>
-        </p:spPr>
-        <p:txBody>
-          <a:bodyPr wrap="square" anchor="t">
-            <a:spAutoFit/>
-          </a:bodyPr>
-          <a:lstStyle/>
-          <a:p>
-            <a:pPr algn="l">
-              <a:lnSpc>
-                <a:spcPct val="115000"/>
-              </a:lnSpc>
-            </a:pPr>
-            <a:r>
-              <a:rPr sz="1500" b="1" i="0">
-                <a:solidFill>
-                  <a:srgbClr val="F5A524"/>
-                </a:solidFill>
-                <a:latin typeface="Segoe UI"/>
-              </a:rPr>
-              <a:t>The narrow true claim beats the broad false one - and a judge can only catch you on the second.</a:t>
+              <a:t>Imported from OpenStreetMap, simulated in SUMO. The ambulance gains and everyone else does not lose - which is the only version of this that a city would accept.</a:t>
             </a:r>
           </a:p>
         </p:txBody>
@@ -4622,7 +4257,7 @@
                 </a:solidFill>
                 <a:latin typeface="Consolas"/>
               </a:rPr>
-              <a:t>WHAT BREAKS FIRST</a:t>
+              <a:t>WHAT IS ALREADY OUT THERE</a:t>
             </a:r>
           </a:p>
         </p:txBody>
@@ -4655,41 +4290,446 @@
               </a:lnSpc>
             </a:pPr>
             <a:r>
-              <a:rPr sz="3600" b="1" i="0">
+              <a:rPr sz="3200" b="1" i="0">
                 <a:solidFill>
                   <a:srgbClr val="E8ECF2"/>
                 </a:solidFill>
                 <a:latin typeface="Segoe UI"/>
               </a:rPr>
-              <a:t>Why the QUBO is the interesting part</a:t>
-            </a:r>
-          </a:p>
-        </p:txBody>
-      </p:sp>
-      <p:pic>
-        <p:nvPicPr>
-          <p:cNvPr id="5" name="Picture 4" descr="scale.png"/>
-          <p:cNvPicPr>
-            <a:picLocks noChangeAspect="1"/>
-          </p:cNvPicPr>
-          <p:nvPr/>
-        </p:nvPicPr>
-        <p:blipFill>
-          <a:blip r:embed="rId2"/>
-          <a:stretch>
-            <a:fillRect/>
-          </a:stretch>
-        </p:blipFill>
-        <p:spPr>
-          <a:xfrm>
-            <a:off x="1432407" y="1920240"/>
-            <a:ext cx="9326880" cy="4123463"/>
-          </a:xfrm>
-          <a:prstGeom prst="rect">
-            <a:avLst/>
-          </a:prstGeom>
-        </p:spPr>
-      </p:pic>
+              <a:t>Adaptive control is not new. I am not pretending it is.</a:t>
+            </a:r>
+          </a:p>
+        </p:txBody>
+      </p:sp>
+      <p:sp>
+        <p:nvSpPr>
+          <p:cNvPr id="5" name="Rectangle 4"/>
+          <p:cNvSpPr/>
+          <p:nvPr/>
+        </p:nvSpPr>
+        <p:spPr>
+          <a:xfrm>
+            <a:off x="777240" y="1965960"/>
+            <a:ext cx="822960" cy="32004"/>
+          </a:xfrm>
+          <a:prstGeom prst="rect">
+            <a:avLst/>
+          </a:prstGeom>
+          <a:solidFill>
+            <a:srgbClr val="8A94A6"/>
+          </a:solidFill>
+          <a:ln>
+            <a:noFill/>
+          </a:ln>
+          <a:effectLst/>
+        </p:spPr>
+        <p:style>
+          <a:lnRef idx="1">
+            <a:schemeClr val="accent1"/>
+          </a:lnRef>
+          <a:fillRef idx="3">
+            <a:schemeClr val="accent1"/>
+          </a:fillRef>
+          <a:effectRef idx="2">
+            <a:schemeClr val="accent1"/>
+          </a:effectRef>
+          <a:fontRef idx="minor">
+            <a:schemeClr val="lt1"/>
+          </a:fontRef>
+        </p:style>
+        <p:txBody>
+          <a:bodyPr rtlCol="0" anchor="ctr"/>
+          <a:lstStyle/>
+          <a:p>
+            <a:pPr algn="ctr"/>
+          </a:p>
+        </p:txBody>
+      </p:sp>
+      <p:sp>
+        <p:nvSpPr>
+          <p:cNvPr id="6" name="TextBox 5"/>
+          <p:cNvSpPr txBox="1"/>
+          <p:nvPr/>
+        </p:nvSpPr>
+        <p:spPr>
+          <a:xfrm>
+            <a:off x="777240" y="2240280"/>
+            <a:ext cx="4937760" cy="2194560"/>
+          </a:xfrm>
+          <a:prstGeom prst="rect">
+            <a:avLst/>
+          </a:prstGeom>
+          <a:noFill/>
+        </p:spPr>
+        <p:txBody>
+          <a:bodyPr wrap="square" anchor="t">
+            <a:spAutoFit/>
+          </a:bodyPr>
+          <a:lstStyle/>
+          <a:p>
+            <a:pPr algn="l">
+              <a:lnSpc>
+                <a:spcPct val="140000"/>
+              </a:lnSpc>
+            </a:pPr>
+            <a:r>
+              <a:rPr sz="1500" b="0" i="0">
+                <a:solidFill>
+                  <a:srgbClr val="8A94A6"/>
+                </a:solidFill>
+                <a:latin typeface="Segoe UI"/>
+              </a:rPr>
+              <a:t>ALREADY DEPLOYED</a:t>
+            </a:r>
+          </a:p>
+          <a:p>
+            <a:pPr algn="l">
+              <a:lnSpc>
+                <a:spcPct val="140000"/>
+              </a:lnSpc>
+            </a:pPr>
+            <a:r>
+              <a:rPr sz="1500" b="0" i="0">
+                <a:solidFill>
+                  <a:srgbClr val="8A94A6"/>
+                </a:solidFill>
+                <a:latin typeface="Segoe UI"/>
+              </a:rPr>
+              <a:t/>
+            </a:r>
+          </a:p>
+          <a:p>
+            <a:pPr algn="l">
+              <a:lnSpc>
+                <a:spcPct val="140000"/>
+              </a:lnSpc>
+            </a:pPr>
+            <a:r>
+              <a:rPr sz="1500" b="0" i="0">
+                <a:solidFill>
+                  <a:srgbClr val="8A94A6"/>
+                </a:solidFill>
+                <a:latin typeface="Segoe UI"/>
+              </a:rPr>
+              <a:t>Bengaluru B-ATCS</a:t>
+            </a:r>
+          </a:p>
+          <a:p>
+            <a:pPr algn="l">
+              <a:lnSpc>
+                <a:spcPct val="140000"/>
+              </a:lnSpc>
+            </a:pPr>
+            <a:r>
+              <a:rPr sz="1500" b="0" i="0">
+                <a:solidFill>
+                  <a:srgbClr val="8A94A6"/>
+                </a:solidFill>
+                <a:latin typeface="Segoe UI"/>
+              </a:rPr>
+              <a:t>~165 junctions, ~33% at Hudson Circle</a:t>
+            </a:r>
+          </a:p>
+          <a:p>
+            <a:pPr algn="l">
+              <a:lnSpc>
+                <a:spcPct val="140000"/>
+              </a:lnSpc>
+            </a:pPr>
+            <a:r>
+              <a:rPr sz="1500" b="0" i="0">
+                <a:solidFill>
+                  <a:srgbClr val="8A94A6"/>
+                </a:solidFill>
+                <a:latin typeface="Segoe UI"/>
+              </a:rPr>
+              <a:t/>
+            </a:r>
+          </a:p>
+          <a:p>
+            <a:pPr algn="l">
+              <a:lnSpc>
+                <a:spcPct val="140000"/>
+              </a:lnSpc>
+            </a:pPr>
+            <a:r>
+              <a:rPr sz="1500" b="0" i="0">
+                <a:solidFill>
+                  <a:srgbClr val="8A94A6"/>
+                </a:solidFill>
+                <a:latin typeface="Segoe UI"/>
+              </a:rPr>
+              <a:t>Pittsburgh Surtrac</a:t>
+            </a:r>
+          </a:p>
+          <a:p>
+            <a:pPr algn="l">
+              <a:lnSpc>
+                <a:spcPct val="140000"/>
+              </a:lnSpc>
+            </a:pPr>
+            <a:r>
+              <a:rPr sz="1500" b="0" i="0">
+                <a:solidFill>
+                  <a:srgbClr val="8A94A6"/>
+                </a:solidFill>
+                <a:latin typeface="Segoe UI"/>
+              </a:rPr>
+              <a:t>~25% travel time reduction</a:t>
+            </a:r>
+          </a:p>
+        </p:txBody>
+      </p:sp>
+      <p:sp>
+        <p:nvSpPr>
+          <p:cNvPr id="7" name="Rectangle 6"/>
+          <p:cNvSpPr/>
+          <p:nvPr/>
+        </p:nvSpPr>
+        <p:spPr>
+          <a:xfrm>
+            <a:off x="6126480" y="1965960"/>
+            <a:ext cx="822960" cy="32004"/>
+          </a:xfrm>
+          <a:prstGeom prst="rect">
+            <a:avLst/>
+          </a:prstGeom>
+          <a:solidFill>
+            <a:srgbClr val="F5A524"/>
+          </a:solidFill>
+          <a:ln>
+            <a:noFill/>
+          </a:ln>
+          <a:effectLst/>
+        </p:spPr>
+        <p:style>
+          <a:lnRef idx="1">
+            <a:schemeClr val="accent1"/>
+          </a:lnRef>
+          <a:fillRef idx="3">
+            <a:schemeClr val="accent1"/>
+          </a:fillRef>
+          <a:effectRef idx="2">
+            <a:schemeClr val="accent1"/>
+          </a:effectRef>
+          <a:fontRef idx="minor">
+            <a:schemeClr val="lt1"/>
+          </a:fontRef>
+        </p:style>
+        <p:txBody>
+          <a:bodyPr rtlCol="0" anchor="ctr"/>
+          <a:lstStyle/>
+          <a:p>
+            <a:pPr algn="ctr"/>
+          </a:p>
+        </p:txBody>
+      </p:sp>
+      <p:sp>
+        <p:nvSpPr>
+          <p:cNvPr id="8" name="TextBox 7"/>
+          <p:cNvSpPr txBox="1"/>
+          <p:nvPr/>
+        </p:nvSpPr>
+        <p:spPr>
+          <a:xfrm>
+            <a:off x="6126480" y="2240280"/>
+            <a:ext cx="5212080" cy="2926080"/>
+          </a:xfrm>
+          <a:prstGeom prst="rect">
+            <a:avLst/>
+          </a:prstGeom>
+          <a:noFill/>
+        </p:spPr>
+        <p:txBody>
+          <a:bodyPr wrap="square" anchor="t">
+            <a:spAutoFit/>
+          </a:bodyPr>
+          <a:lstStyle/>
+          <a:p>
+            <a:pPr algn="l">
+              <a:lnSpc>
+                <a:spcPct val="140000"/>
+              </a:lnSpc>
+            </a:pPr>
+            <a:r>
+              <a:rPr sz="1500" b="0" i="0">
+                <a:solidFill>
+                  <a:srgbClr val="E8ECF2"/>
+                </a:solidFill>
+                <a:latin typeface="Segoe UI"/>
+              </a:rPr>
+              <a:t>WHAT THEY DO NOT GIVE YOU</a:t>
+            </a:r>
+          </a:p>
+          <a:p>
+            <a:pPr algn="l">
+              <a:lnSpc>
+                <a:spcPct val="140000"/>
+              </a:lnSpc>
+            </a:pPr>
+            <a:r>
+              <a:rPr sz="1500" b="0" i="0">
+                <a:solidFill>
+                  <a:srgbClr val="E8ECF2"/>
+                </a:solidFill>
+                <a:latin typeface="Segoe UI"/>
+              </a:rPr>
+              <a:t/>
+            </a:r>
+          </a:p>
+          <a:p>
+            <a:pPr algn="l">
+              <a:lnSpc>
+                <a:spcPct val="140000"/>
+              </a:lnSpc>
+            </a:pPr>
+            <a:r>
+              <a:rPr sz="1500" b="0" i="0">
+                <a:solidFill>
+                  <a:srgbClr val="E8ECF2"/>
+                </a:solidFill>
+                <a:latin typeface="Segoe UI"/>
+              </a:rPr>
+              <a:t>Preview a change before deploying it,</a:t>
+            </a:r>
+          </a:p>
+          <a:p>
+            <a:pPr algn="l">
+              <a:lnSpc>
+                <a:spcPct val="140000"/>
+              </a:lnSpc>
+            </a:pPr>
+            <a:r>
+              <a:rPr sz="1500" b="0" i="0">
+                <a:solidFill>
+                  <a:srgbClr val="E8ECF2"/>
+                </a:solidFill>
+                <a:latin typeface="Segoe UI"/>
+              </a:rPr>
+              <a:t>on the same traffic</a:t>
+            </a:r>
+          </a:p>
+          <a:p>
+            <a:pPr algn="l">
+              <a:lnSpc>
+                <a:spcPct val="140000"/>
+              </a:lnSpc>
+            </a:pPr>
+            <a:r>
+              <a:rPr sz="1500" b="0" i="0">
+                <a:solidFill>
+                  <a:srgbClr val="E8ECF2"/>
+                </a:solidFill>
+                <a:latin typeface="Segoe UI"/>
+              </a:rPr>
+              <a:t/>
+            </a:r>
+          </a:p>
+          <a:p>
+            <a:pPr algn="l">
+              <a:lnSpc>
+                <a:spcPct val="140000"/>
+              </a:lnSpc>
+            </a:pPr>
+            <a:r>
+              <a:rPr sz="1500" b="0" i="0">
+                <a:solidFill>
+                  <a:srgbClr val="E8ECF2"/>
+                </a:solidFill>
+                <a:latin typeface="Segoe UI"/>
+              </a:rPr>
+              <a:t>A stated reason for every decision,</a:t>
+            </a:r>
+          </a:p>
+          <a:p>
+            <a:pPr algn="l">
+              <a:lnSpc>
+                <a:spcPct val="140000"/>
+              </a:lnSpc>
+            </a:pPr>
+            <a:r>
+              <a:rPr sz="1500" b="0" i="0">
+                <a:solidFill>
+                  <a:srgbClr val="E8ECF2"/>
+                </a:solidFill>
+                <a:latin typeface="Segoe UI"/>
+              </a:rPr>
+              <a:t>in numbers you can check</a:t>
+            </a:r>
+          </a:p>
+          <a:p>
+            <a:pPr algn="l">
+              <a:lnSpc>
+                <a:spcPct val="140000"/>
+              </a:lnSpc>
+            </a:pPr>
+            <a:r>
+              <a:rPr sz="1500" b="0" i="0">
+                <a:solidFill>
+                  <a:srgbClr val="E8ECF2"/>
+                </a:solidFill>
+                <a:latin typeface="Segoe UI"/>
+              </a:rPr>
+              <a:t/>
+            </a:r>
+          </a:p>
+          <a:p>
+            <a:pPr algn="l">
+              <a:lnSpc>
+                <a:spcPct val="140000"/>
+              </a:lnSpc>
+            </a:pPr>
+            <a:r>
+              <a:rPr sz="1500" b="0" i="0">
+                <a:solidFill>
+                  <a:srgbClr val="E8ECF2"/>
+                </a:solidFill>
+                <a:latin typeface="Segoe UI"/>
+              </a:rPr>
+              <a:t>A published price for granting priority</a:t>
+            </a:r>
+          </a:p>
+        </p:txBody>
+      </p:sp>
+      <p:sp>
+        <p:nvSpPr>
+          <p:cNvPr id="9" name="TextBox 8"/>
+          <p:cNvSpPr txBox="1"/>
+          <p:nvPr/>
+        </p:nvSpPr>
+        <p:spPr>
+          <a:xfrm>
+            <a:off x="777240" y="5577840"/>
+            <a:ext cx="10607040" cy="731520"/>
+          </a:xfrm>
+          <a:prstGeom prst="rect">
+            <a:avLst/>
+          </a:prstGeom>
+          <a:noFill/>
+        </p:spPr>
+        <p:txBody>
+          <a:bodyPr wrap="square" anchor="t">
+            <a:spAutoFit/>
+          </a:bodyPr>
+          <a:lstStyle/>
+          <a:p>
+            <a:pPr algn="l">
+              <a:lnSpc>
+                <a:spcPct val="115000"/>
+              </a:lnSpc>
+            </a:pPr>
+            <a:r>
+              <a:rPr sz="1500" b="1" i="0">
+                <a:solidFill>
+                  <a:srgbClr val="F5A524"/>
+                </a:solidFill>
+                <a:latin typeface="Segoe UI"/>
+              </a:rPr>
+              <a:t>The narrow true claim beats the broad false one - and a judge can only catch you on the second.</a:t>
+            </a:r>
+          </a:p>
+        </p:txBody>
+      </p:sp>
     </p:spTree>
   </p:cSld>
   <p:clrMapOvr>
@@ -4786,14 +4826,53 @@
                 </a:solidFill>
                 <a:latin typeface="Consolas"/>
               </a:rPr>
-              <a:t>THE THING I DID NOT EXPECT TO FIND</a:t>
+              <a:t>WHAT BREAKS FIRST</a:t>
+            </a:r>
+          </a:p>
+        </p:txBody>
+      </p:sp>
+      <p:sp>
+        <p:nvSpPr>
+          <p:cNvPr id="4" name="TextBox 3"/>
+          <p:cNvSpPr txBox="1"/>
+          <p:nvPr/>
+        </p:nvSpPr>
+        <p:spPr>
+          <a:xfrm>
+            <a:off x="777240" y="960120"/>
+            <a:ext cx="10607040" cy="1188720"/>
+          </a:xfrm>
+          <a:prstGeom prst="rect">
+            <a:avLst/>
+          </a:prstGeom>
+          <a:noFill/>
+        </p:spPr>
+        <p:txBody>
+          <a:bodyPr wrap="square" anchor="t">
+            <a:spAutoFit/>
+          </a:bodyPr>
+          <a:lstStyle/>
+          <a:p>
+            <a:pPr algn="l">
+              <a:lnSpc>
+                <a:spcPct val="115000"/>
+              </a:lnSpc>
+            </a:pPr>
+            <a:r>
+              <a:rPr sz="3600" b="1" i="0">
+                <a:solidFill>
+                  <a:srgbClr val="E8ECF2"/>
+                </a:solidFill>
+                <a:latin typeface="Segoe UI"/>
+              </a:rPr>
+              <a:t>Why the QUBO is the interesting part</a:t>
             </a:r>
           </a:p>
         </p:txBody>
       </p:sp>
       <p:pic>
         <p:nvPicPr>
-          <p:cNvPr id="4" name="Picture 3" descr="osm.png"/>
+          <p:cNvPr id="5" name="Picture 4" descr="scale.png"/>
           <p:cNvPicPr>
             <a:picLocks noChangeAspect="1"/>
           </p:cNvPicPr>
@@ -4807,69 +4886,14 @@
         </p:blipFill>
         <p:spPr>
           <a:xfrm>
-            <a:off x="1066647" y="1737360"/>
-            <a:ext cx="10058400" cy="3621024"/>
+            <a:off x="1432407" y="1920240"/>
+            <a:ext cx="9326880" cy="4123463"/>
           </a:xfrm>
           <a:prstGeom prst="rect">
             <a:avLst/>
           </a:prstGeom>
         </p:spPr>
       </p:pic>
-      <p:sp>
-        <p:nvSpPr>
-          <p:cNvPr id="5" name="TextBox 4"/>
-          <p:cNvSpPr txBox="1"/>
-          <p:nvPr/>
-        </p:nvSpPr>
-        <p:spPr>
-          <a:xfrm>
-            <a:off x="777240" y="5120640"/>
-            <a:ext cx="10607040" cy="1097280"/>
-          </a:xfrm>
-          <a:prstGeom prst="rect">
-            <a:avLst/>
-          </a:prstGeom>
-          <a:noFill/>
-        </p:spPr>
-        <p:txBody>
-          <a:bodyPr wrap="square" anchor="t">
-            <a:spAutoFit/>
-          </a:bodyPr>
-          <a:lstStyle/>
-          <a:p>
-            <a:pPr algn="ctr">
-              <a:lnSpc>
-                <a:spcPct val="135000"/>
-              </a:lnSpc>
-            </a:pPr>
-            <a:r>
-              <a:rPr sz="2100" b="0" i="0">
-                <a:solidFill>
-                  <a:srgbClr val="E8ECF2"/>
-                </a:solidFill>
-                <a:latin typeface="Segoe UI"/>
-              </a:rPr>
-              <a:t>So the first useful thing is not a better algorithm.</a:t>
-            </a:r>
-          </a:p>
-          <a:p>
-            <a:pPr algn="ctr">
-              <a:lnSpc>
-                <a:spcPct val="135000"/>
-              </a:lnSpc>
-            </a:pPr>
-            <a:r>
-              <a:rPr sz="2100" b="0" i="0">
-                <a:solidFill>
-                  <a:srgbClr val="E8ECF2"/>
-                </a:solidFill>
-                <a:latin typeface="Segoe UI"/>
-              </a:rPr>
-              <a:t>It is a place to test decisions before you can afford the sensors.</a:t>
-            </a:r>
-          </a:p>
-        </p:txBody>
-      </p:sp>
     </p:spTree>
   </p:cSld>
   <p:clrMapOvr>
@@ -4966,21 +4990,45 @@
                 </a:solidFill>
                 <a:latin typeface="Consolas"/>
               </a:rPr>
-              <a:t>HOW YOU KNOW IT RUNS</a:t>
-            </a:r>
-          </a:p>
-        </p:txBody>
-      </p:sp>
-      <p:sp>
-        <p:nvSpPr>
-          <p:cNvPr id="4" name="TextBox 3"/>
+              <a:t>THE THING I DID NOT EXPECT TO FIND</a:t>
+            </a:r>
+          </a:p>
+        </p:txBody>
+      </p:sp>
+      <p:pic>
+        <p:nvPicPr>
+          <p:cNvPr id="4" name="Picture 3" descr="osm.png"/>
+          <p:cNvPicPr>
+            <a:picLocks noChangeAspect="1"/>
+          </p:cNvPicPr>
+          <p:nvPr/>
+        </p:nvPicPr>
+        <p:blipFill>
+          <a:blip r:embed="rId2"/>
+          <a:stretch>
+            <a:fillRect/>
+          </a:stretch>
+        </p:blipFill>
+        <p:spPr>
+          <a:xfrm>
+            <a:off x="1066647" y="1737360"/>
+            <a:ext cx="10058400" cy="3621024"/>
+          </a:xfrm>
+          <a:prstGeom prst="rect">
+            <a:avLst/>
+          </a:prstGeom>
+        </p:spPr>
+      </p:pic>
+      <p:sp>
+        <p:nvSpPr>
+          <p:cNvPr id="5" name="TextBox 4"/>
           <p:cNvSpPr txBox="1"/>
           <p:nvPr/>
         </p:nvSpPr>
         <p:spPr>
           <a:xfrm>
-            <a:off x="777240" y="960120"/>
-            <a:ext cx="10607040" cy="1188720"/>
+            <a:off x="777240" y="5120640"/>
+            <a:ext cx="10607040" cy="1097280"/>
           </a:xfrm>
           <a:prstGeom prst="rect">
             <a:avLst/>
@@ -4993,44 +5041,76 @@
           </a:bodyPr>
           <a:lstStyle/>
           <a:p>
-            <a:pPr algn="l">
-              <a:lnSpc>
-                <a:spcPct val="115000"/>
-              </a:lnSpc>
-            </a:pPr>
-            <a:r>
-              <a:rPr sz="3800" b="1" i="0">
+            <a:pPr algn="ctr">
+              <a:lnSpc>
+                <a:spcPct val="135000"/>
+              </a:lnSpc>
+            </a:pPr>
+            <a:r>
+              <a:rPr sz="2100" b="0" i="0">
                 <a:solidFill>
                   <a:srgbClr val="E8ECF2"/>
                 </a:solidFill>
                 <a:latin typeface="Segoe UI"/>
               </a:rPr>
-              <a:t>It is tested, not just demoed</a:t>
-            </a:r>
-          </a:p>
-        </p:txBody>
-      </p:sp>
-      <p:sp>
-        <p:nvSpPr>
-          <p:cNvPr id="5" name="Rounded Rectangle 4"/>
+              <a:t>So the first useful thing is not a better algorithm.</a:t>
+            </a:r>
+          </a:p>
+          <a:p>
+            <a:pPr algn="ctr">
+              <a:lnSpc>
+                <a:spcPct val="135000"/>
+              </a:lnSpc>
+            </a:pPr>
+            <a:r>
+              <a:rPr sz="2100" b="0" i="0">
+                <a:solidFill>
+                  <a:srgbClr val="E8ECF2"/>
+                </a:solidFill>
+                <a:latin typeface="Segoe UI"/>
+              </a:rPr>
+              <a:t>It is a place to test decisions before you can afford the sensors.</a:t>
+            </a:r>
+          </a:p>
+        </p:txBody>
+      </p:sp>
+    </p:spTree>
+  </p:cSld>
+  <p:clrMapOvr>
+    <a:masterClrMapping/>
+  </p:clrMapOvr>
+</p:sld>
+</file>
+
+<file path=ppt/slides/slide17.xml><?xml version="1.0" encoding="utf-8"?>
+<p:sld xmlns:a="http://schemas.openxmlformats.org/drawingml/2006/main" xmlns:p="http://schemas.openxmlformats.org/presentationml/2006/main" xmlns:r="http://schemas.openxmlformats.org/officeDocument/2006/relationships">
+  <p:cSld>
+    <p:spTree>
+      <p:nvGrpSpPr>
+        <p:cNvPr id="1" name=""/>
+        <p:cNvGrpSpPr/>
+        <p:nvPr/>
+      </p:nvGrpSpPr>
+      <p:grpSpPr/>
+      <p:sp>
+        <p:nvSpPr>
+          <p:cNvPr id="2" name="Rectangle 1"/>
           <p:cNvSpPr/>
           <p:nvPr/>
         </p:nvSpPr>
         <p:spPr>
           <a:xfrm>
-            <a:off x="777240" y="2194560"/>
-            <a:ext cx="3291840" cy="1828800"/>
-          </a:xfrm>
-          <a:prstGeom prst="roundRect">
+            <a:off x="0" y="0"/>
+            <a:ext cx="12191695" cy="6858000"/>
+          </a:xfrm>
+          <a:prstGeom prst="rect">
             <a:avLst/>
           </a:prstGeom>
           <a:solidFill>
-            <a:srgbClr val="171C24"/>
+            <a:srgbClr val="0E1116"/>
           </a:solidFill>
-          <a:ln w="15875">
-            <a:solidFill>
-              <a:srgbClr val="2ECC71"/>
-            </a:solidFill>
+          <a:ln>
+            <a:noFill/>
           </a:ln>
           <a:effectLst/>
         </p:spPr>
@@ -5051,19 +5131,21 @@
         <p:txBody>
           <a:bodyPr rtlCol="0" anchor="ctr"/>
           <a:lstStyle/>
-          <a:p/>
-        </p:txBody>
-      </p:sp>
-      <p:sp>
-        <p:nvSpPr>
-          <p:cNvPr id="6" name="TextBox 5"/>
+          <a:p>
+            <a:pPr algn="ctr"/>
+          </a:p>
+        </p:txBody>
+      </p:sp>
+      <p:sp>
+        <p:nvSpPr>
+          <p:cNvPr id="3" name="TextBox 2"/>
           <p:cNvSpPr txBox="1"/>
           <p:nvPr/>
         </p:nvSpPr>
         <p:spPr>
           <a:xfrm>
-            <a:off x="1005840" y="2450591"/>
-            <a:ext cx="2834640" cy="822960"/>
+            <a:off x="777240" y="502920"/>
+            <a:ext cx="10058400" cy="365760"/>
           </a:xfrm>
           <a:prstGeom prst="rect">
             <a:avLst/>
@@ -5082,27 +5164,27 @@
               </a:lnSpc>
             </a:pPr>
             <a:r>
-              <a:rPr sz="3400" b="1" i="0">
-                <a:solidFill>
-                  <a:srgbClr val="2ECC71"/>
-                </a:solidFill>
-                <a:latin typeface="Segoe UI"/>
-              </a:rPr>
-              <a:t>21</a:t>
-            </a:r>
-          </a:p>
-        </p:txBody>
-      </p:sp>
-      <p:sp>
-        <p:nvSpPr>
-          <p:cNvPr id="7" name="TextBox 6"/>
+              <a:rPr sz="1300" b="1" i="0">
+                <a:solidFill>
+                  <a:srgbClr val="F5A524"/>
+                </a:solidFill>
+                <a:latin typeface="Consolas"/>
+              </a:rPr>
+              <a:t>HOW YOU KNOW IT RUNS</a:t>
+            </a:r>
+          </a:p>
+        </p:txBody>
+      </p:sp>
+      <p:sp>
+        <p:nvSpPr>
+          <p:cNvPr id="4" name="TextBox 3"/>
           <p:cNvSpPr txBox="1"/>
           <p:nvPr/>
         </p:nvSpPr>
         <p:spPr>
           <a:xfrm>
-            <a:off x="1005840" y="3218688"/>
-            <a:ext cx="2834640" cy="731520"/>
+            <a:off x="777240" y="960120"/>
+            <a:ext cx="10607040" cy="1188720"/>
           </a:xfrm>
           <a:prstGeom prst="rect">
             <a:avLst/>
@@ -5121,42 +5203,26 @@
               </a:lnSpc>
             </a:pPr>
             <a:r>
-              <a:rPr sz="1300" b="0" i="0">
-                <a:solidFill>
-                  <a:srgbClr val="8A94A6"/>
-                </a:solidFill>
-                <a:latin typeface="Segoe UI"/>
-              </a:rPr>
-              <a:t>simulation assertions</a:t>
-            </a:r>
-          </a:p>
-          <a:p>
-            <a:pPr algn="l">
-              <a:lnSpc>
-                <a:spcPct val="115000"/>
-              </a:lnSpc>
-            </a:pPr>
-            <a:r>
-              <a:rPr sz="1300" b="0" i="0">
-                <a:solidFill>
-                  <a:srgbClr val="8A94A6"/>
-                </a:solidFill>
-                <a:latin typeface="Segoe UI"/>
-              </a:rPr>
-              <a:t>no browser needed</a:t>
-            </a:r>
-          </a:p>
-        </p:txBody>
-      </p:sp>
-      <p:sp>
-        <p:nvSpPr>
-          <p:cNvPr id="8" name="Rounded Rectangle 7"/>
+              <a:rPr sz="3800" b="1" i="0">
+                <a:solidFill>
+                  <a:srgbClr val="E8ECF2"/>
+                </a:solidFill>
+                <a:latin typeface="Segoe UI"/>
+              </a:rPr>
+              <a:t>It is tested, not just demoed</a:t>
+            </a:r>
+          </a:p>
+        </p:txBody>
+      </p:sp>
+      <p:sp>
+        <p:nvSpPr>
+          <p:cNvPr id="5" name="Rounded Rectangle 4"/>
           <p:cNvSpPr/>
           <p:nvPr/>
         </p:nvSpPr>
         <p:spPr>
           <a:xfrm>
-            <a:off x="4434840" y="2194560"/>
+            <a:off x="777240" y="2194560"/>
             <a:ext cx="3291840" cy="1828800"/>
           </a:xfrm>
           <a:prstGeom prst="roundRect">
@@ -5167,7 +5233,7 @@
           </a:solidFill>
           <a:ln w="15875">
             <a:solidFill>
-              <a:srgbClr val="4C9AFF"/>
+              <a:srgbClr val="2ECC71"/>
             </a:solidFill>
           </a:ln>
           <a:effectLst/>
@@ -5194,13 +5260,13 @@
       </p:sp>
       <p:sp>
         <p:nvSpPr>
-          <p:cNvPr id="9" name="TextBox 8"/>
+          <p:cNvPr id="6" name="TextBox 5"/>
           <p:cNvSpPr txBox="1"/>
           <p:nvPr/>
         </p:nvSpPr>
         <p:spPr>
           <a:xfrm>
-            <a:off x="4663440" y="2450591"/>
+            <a:off x="1005840" y="2450591"/>
             <a:ext cx="2834640" cy="822960"/>
           </a:xfrm>
           <a:prstGeom prst="rect">
@@ -5222,24 +5288,24 @@
             <a:r>
               <a:rPr sz="3400" b="1" i="0">
                 <a:solidFill>
-                  <a:srgbClr val="4C9AFF"/>
-                </a:solidFill>
-                <a:latin typeface="Segoe UI"/>
-              </a:rPr>
-              <a:t>41</a:t>
-            </a:r>
-          </a:p>
-        </p:txBody>
-      </p:sp>
-      <p:sp>
-        <p:nvSpPr>
-          <p:cNvPr id="10" name="TextBox 9"/>
+                  <a:srgbClr val="2ECC71"/>
+                </a:solidFill>
+                <a:latin typeface="Segoe UI"/>
+              </a:rPr>
+              <a:t>21</a:t>
+            </a:r>
+          </a:p>
+        </p:txBody>
+      </p:sp>
+      <p:sp>
+        <p:nvSpPr>
+          <p:cNvPr id="7" name="TextBox 6"/>
           <p:cNvSpPr txBox="1"/>
           <p:nvPr/>
         </p:nvSpPr>
         <p:spPr>
           <a:xfrm>
-            <a:off x="4663440" y="3218688"/>
+            <a:off x="1005840" y="3218688"/>
             <a:ext cx="2834640" cy="731520"/>
           </a:xfrm>
           <a:prstGeom prst="rect">
@@ -5265,7 +5331,7 @@
                 </a:solidFill>
                 <a:latin typeface="Segoe UI"/>
               </a:rPr>
-              <a:t>checks driving both pages</a:t>
+              <a:t>simulation assertions</a:t>
             </a:r>
           </a:p>
           <a:p>
@@ -5281,20 +5347,20 @@
                 </a:solidFill>
                 <a:latin typeface="Segoe UI"/>
               </a:rPr>
-              <a:t>in real Chromium</a:t>
-            </a:r>
-          </a:p>
-        </p:txBody>
-      </p:sp>
-      <p:sp>
-        <p:nvSpPr>
-          <p:cNvPr id="11" name="Rounded Rectangle 10"/>
+              <a:t>no browser needed</a:t>
+            </a:r>
+          </a:p>
+        </p:txBody>
+      </p:sp>
+      <p:sp>
+        <p:nvSpPr>
+          <p:cNvPr id="8" name="Rounded Rectangle 7"/>
           <p:cNvSpPr/>
           <p:nvPr/>
         </p:nvSpPr>
         <p:spPr>
           <a:xfrm>
-            <a:off x="8092440" y="2194560"/>
+            <a:off x="4434840" y="2194560"/>
             <a:ext cx="3291840" cy="1828800"/>
           </a:xfrm>
           <a:prstGeom prst="roundRect">
@@ -5305,7 +5371,7 @@
           </a:solidFill>
           <a:ln w="15875">
             <a:solidFill>
-              <a:srgbClr val="F5A524"/>
+              <a:srgbClr val="4C9AFF"/>
             </a:solidFill>
           </a:ln>
           <a:effectLst/>
@@ -5332,6 +5398,144 @@
       </p:sp>
       <p:sp>
         <p:nvSpPr>
+          <p:cNvPr id="9" name="TextBox 8"/>
+          <p:cNvSpPr txBox="1"/>
+          <p:nvPr/>
+        </p:nvSpPr>
+        <p:spPr>
+          <a:xfrm>
+            <a:off x="4663440" y="2450591"/>
+            <a:ext cx="2834640" cy="822960"/>
+          </a:xfrm>
+          <a:prstGeom prst="rect">
+            <a:avLst/>
+          </a:prstGeom>
+          <a:noFill/>
+        </p:spPr>
+        <p:txBody>
+          <a:bodyPr wrap="square" anchor="t">
+            <a:spAutoFit/>
+          </a:bodyPr>
+          <a:lstStyle/>
+          <a:p>
+            <a:pPr algn="l">
+              <a:lnSpc>
+                <a:spcPct val="115000"/>
+              </a:lnSpc>
+            </a:pPr>
+            <a:r>
+              <a:rPr sz="3400" b="1" i="0">
+                <a:solidFill>
+                  <a:srgbClr val="4C9AFF"/>
+                </a:solidFill>
+                <a:latin typeface="Segoe UI"/>
+              </a:rPr>
+              <a:t>41</a:t>
+            </a:r>
+          </a:p>
+        </p:txBody>
+      </p:sp>
+      <p:sp>
+        <p:nvSpPr>
+          <p:cNvPr id="10" name="TextBox 9"/>
+          <p:cNvSpPr txBox="1"/>
+          <p:nvPr/>
+        </p:nvSpPr>
+        <p:spPr>
+          <a:xfrm>
+            <a:off x="4663440" y="3218688"/>
+            <a:ext cx="2834640" cy="731520"/>
+          </a:xfrm>
+          <a:prstGeom prst="rect">
+            <a:avLst/>
+          </a:prstGeom>
+          <a:noFill/>
+        </p:spPr>
+        <p:txBody>
+          <a:bodyPr wrap="square" anchor="t">
+            <a:spAutoFit/>
+          </a:bodyPr>
+          <a:lstStyle/>
+          <a:p>
+            <a:pPr algn="l">
+              <a:lnSpc>
+                <a:spcPct val="115000"/>
+              </a:lnSpc>
+            </a:pPr>
+            <a:r>
+              <a:rPr sz="1300" b="0" i="0">
+                <a:solidFill>
+                  <a:srgbClr val="8A94A6"/>
+                </a:solidFill>
+                <a:latin typeface="Segoe UI"/>
+              </a:rPr>
+              <a:t>checks driving both pages</a:t>
+            </a:r>
+          </a:p>
+          <a:p>
+            <a:pPr algn="l">
+              <a:lnSpc>
+                <a:spcPct val="115000"/>
+              </a:lnSpc>
+            </a:pPr>
+            <a:r>
+              <a:rPr sz="1300" b="0" i="0">
+                <a:solidFill>
+                  <a:srgbClr val="8A94A6"/>
+                </a:solidFill>
+                <a:latin typeface="Segoe UI"/>
+              </a:rPr>
+              <a:t>in real Chromium</a:t>
+            </a:r>
+          </a:p>
+        </p:txBody>
+      </p:sp>
+      <p:sp>
+        <p:nvSpPr>
+          <p:cNvPr id="11" name="Rounded Rectangle 10"/>
+          <p:cNvSpPr/>
+          <p:nvPr/>
+        </p:nvSpPr>
+        <p:spPr>
+          <a:xfrm>
+            <a:off x="8092440" y="2194560"/>
+            <a:ext cx="3291840" cy="1828800"/>
+          </a:xfrm>
+          <a:prstGeom prst="roundRect">
+            <a:avLst/>
+          </a:prstGeom>
+          <a:solidFill>
+            <a:srgbClr val="171C24"/>
+          </a:solidFill>
+          <a:ln w="15875">
+            <a:solidFill>
+              <a:srgbClr val="F5A524"/>
+            </a:solidFill>
+          </a:ln>
+          <a:effectLst/>
+        </p:spPr>
+        <p:style>
+          <a:lnRef idx="1">
+            <a:schemeClr val="accent1"/>
+          </a:lnRef>
+          <a:fillRef idx="3">
+            <a:schemeClr val="accent1"/>
+          </a:fillRef>
+          <a:effectRef idx="2">
+            <a:schemeClr val="accent1"/>
+          </a:effectRef>
+          <a:fontRef idx="minor">
+            <a:schemeClr val="lt1"/>
+          </a:fontRef>
+        </p:style>
+        <p:txBody>
+          <a:bodyPr rtlCol="0" anchor="ctr"/>
+          <a:lstStyle/>
+          <a:p/>
+        </p:txBody>
+      </p:sp>
+      <p:sp>
+        <p:nvSpPr>
           <p:cNvPr id="12" name="TextBox 11"/>
           <p:cNvSpPr txBox="1"/>
           <p:nvPr/>
@@ -5503,7 +5707,7 @@
 </p:sld>
 </file>
 
-<file path=ppt/slides/slide17.xml><?xml version="1.0" encoding="utf-8"?>
+<file path=ppt/slides/slide18.xml><?xml version="1.0" encoding="utf-8"?>
 <p:sld xmlns:a="http://schemas.openxmlformats.org/drawingml/2006/main" xmlns:p="http://schemas.openxmlformats.org/presentationml/2006/main" xmlns:r="http://schemas.openxmlformats.org/officeDocument/2006/relationships">
   <p:cSld>
     <p:spTree>

--- a/docs/NEXUS_Round2.pptx
+++ b/docs/NEXUS_Round2.pptx
@@ -3750,7 +3750,7 @@
                 </a:solidFill>
                 <a:latin typeface="Segoe UI"/>
               </a:rPr>
-              <a:t>Axis starts at 28s so the gap is visible. Max-Pressure is a genuinely good published controller - beating it by 6.8% is the honest claim, not 10x.</a:t>
+              <a:t>Axis starts at 31s so the gap is visible. Max-Pressure is a genuinely good published controller - beating it by 2.6% is the honest claim, not 10x.</a:t>
             </a:r>
           </a:p>
         </p:txBody>
@@ -5430,7 +5430,7 @@
                 </a:solidFill>
                 <a:latin typeface="Segoe UI"/>
               </a:rPr>
-              <a:t>41</a:t>
+              <a:t>44</a:t>
             </a:r>
           </a:p>
         </p:txBody>
